--- a/Web Application Development/13.5. JAMstack.pptx
+++ b/Web Application Development/13.5. JAMstack.pptx
@@ -5,10 +5,10 @@
     <p:sldMasterId id="2147483708" r:id="rId1"/>
   </p:sldMasterIdLst>
   <p:notesMasterIdLst>
-    <p:notesMasterId r:id="rId24"/>
+    <p:notesMasterId r:id="rId25"/>
   </p:notesMasterIdLst>
   <p:handoutMasterIdLst>
-    <p:handoutMasterId r:id="rId25"/>
+    <p:handoutMasterId r:id="rId26"/>
   </p:handoutMasterIdLst>
   <p:sldIdLst>
     <p:sldId id="534" r:id="rId2"/>
@@ -32,7 +32,8 @@
     <p:sldId id="549" r:id="rId20"/>
     <p:sldId id="554" r:id="rId21"/>
     <p:sldId id="555" r:id="rId22"/>
-    <p:sldId id="343" r:id="rId23"/>
+    <p:sldId id="556" r:id="rId23"/>
+    <p:sldId id="343" r:id="rId24"/>
   </p:sldIdLst>
   <p:sldSz cx="9144000" cy="6858000" type="screen4x3"/>
   <p:notesSz cx="6858000" cy="9144000"/>
@@ -247,7 +248,7 @@
             <a:fld id="{50D0DBAB-D1C9-4D1B-A41F-EB0AC0278643}" type="datetimeFigureOut">
               <a:rPr lang="en-US" smtClean="0"/>
               <a:pPr/>
-              <a:t>8/5/2025</a:t>
+              <a:t>7/14/2026</a:t>
             </a:fld>
             <a:endParaRPr lang="en-US"/>
           </a:p>
@@ -409,7 +410,7 @@
             <a:fld id="{3A9B2289-D6D1-40EC-85F2-6A14DC834E89}" type="datetimeFigureOut">
               <a:rPr lang="en-US" smtClean="0"/>
               <a:pPr/>
-              <a:t>8/5/2025</a:t>
+              <a:t>7/14/2026</a:t>
             </a:fld>
             <a:endParaRPr lang="en-US"/>
           </a:p>
@@ -948,7 +949,7 @@
               <a:pPr>
                 <a:defRPr/>
               </a:pPr>
-              <a:t>8/5/2025</a:t>
+              <a:t>7/14/2026</a:t>
             </a:fld>
             <a:endParaRPr lang="en-US"/>
           </a:p>
@@ -1140,7 +1141,7 @@
               <a:pPr>
                 <a:defRPr/>
               </a:pPr>
-              <a:t>8/5/2025</a:t>
+              <a:t>7/14/2026</a:t>
             </a:fld>
             <a:endParaRPr lang="en-US"/>
           </a:p>
@@ -1342,7 +1343,7 @@
               <a:pPr>
                 <a:defRPr/>
               </a:pPr>
-              <a:t>8/5/2025</a:t>
+              <a:t>7/14/2026</a:t>
             </a:fld>
             <a:endParaRPr lang="en-US"/>
           </a:p>
@@ -1534,7 +1535,7 @@
               <a:pPr>
                 <a:defRPr/>
               </a:pPr>
-              <a:t>8/5/2025</a:t>
+              <a:t>7/14/2026</a:t>
             </a:fld>
             <a:endParaRPr lang="en-US"/>
           </a:p>
@@ -1802,7 +1803,7 @@
               <a:pPr>
                 <a:defRPr/>
               </a:pPr>
-              <a:t>8/5/2025</a:t>
+              <a:t>7/14/2026</a:t>
             </a:fld>
             <a:endParaRPr lang="en-US"/>
           </a:p>
@@ -2112,7 +2113,7 @@
               <a:pPr>
                 <a:defRPr/>
               </a:pPr>
-              <a:t>8/5/2025</a:t>
+              <a:t>7/14/2026</a:t>
             </a:fld>
             <a:endParaRPr lang="en-US"/>
           </a:p>
@@ -2556,7 +2557,7 @@
               <a:pPr>
                 <a:defRPr/>
               </a:pPr>
-              <a:t>8/5/2025</a:t>
+              <a:t>7/14/2026</a:t>
             </a:fld>
             <a:endParaRPr lang="en-US"/>
           </a:p>
@@ -2696,7 +2697,7 @@
               <a:pPr>
                 <a:defRPr/>
               </a:pPr>
-              <a:t>8/5/2025</a:t>
+              <a:t>7/14/2026</a:t>
             </a:fld>
             <a:endParaRPr lang="en-US"/>
           </a:p>
@@ -2813,7 +2814,7 @@
               <a:pPr>
                 <a:defRPr/>
               </a:pPr>
-              <a:t>8/5/2025</a:t>
+              <a:t>7/14/2026</a:t>
             </a:fld>
             <a:endParaRPr lang="en-US"/>
           </a:p>
@@ -3112,7 +3113,7 @@
               <a:pPr>
                 <a:defRPr/>
               </a:pPr>
-              <a:t>8/5/2025</a:t>
+              <a:t>7/14/2026</a:t>
             </a:fld>
             <a:endParaRPr lang="en-US"/>
           </a:p>
@@ -3390,7 +3391,7 @@
               <a:pPr>
                 <a:defRPr/>
               </a:pPr>
-              <a:t>8/5/2025</a:t>
+              <a:t>7/14/2026</a:t>
             </a:fld>
             <a:endParaRPr lang="en-US"/>
           </a:p>
@@ -3638,7 +3639,7 @@
               <a:pPr>
                 <a:defRPr/>
               </a:pPr>
-              <a:t>8/5/2025</a:t>
+              <a:t>7/14/2026</a:t>
             </a:fld>
             <a:endParaRPr lang="en-US"/>
           </a:p>
@@ -4403,27 +4404,7 @@
             </a:r>
             <a:r>
               <a:rPr lang="en-US" dirty="0" smtClean="0"/>
-              <a:t> brings together JavaScript, APIs, and markup, </a:t>
-            </a:r>
-            <a:r>
-              <a:rPr lang="en-US" dirty="0" smtClean="0"/>
-              <a:t>the three </a:t>
-            </a:r>
-            <a:r>
-              <a:rPr lang="en-US" dirty="0" smtClean="0"/>
-              <a:t>core components used to create sites that are both fast </a:t>
-            </a:r>
-            <a:r>
-              <a:rPr lang="en-US" dirty="0" smtClean="0"/>
-              <a:t>and highly </a:t>
-            </a:r>
-            <a:r>
-              <a:rPr lang="en-US" dirty="0" smtClean="0"/>
-              <a:t>dynamic</a:t>
-            </a:r>
-            <a:r>
-              <a:rPr lang="en-US" dirty="0" smtClean="0"/>
-              <a:t>.</a:t>
+              <a:t> brings together JavaScript, APIs, and markup, the three core components used to create sites that are both fast and highly dynamic.</a:t>
             </a:r>
           </a:p>
         </p:txBody>
@@ -4544,43 +4525,7 @@
           <a:p>
             <a:r>
               <a:rPr lang="en-US" sz="2200" dirty="0" smtClean="0"/>
-              <a:t>A </a:t>
-            </a:r>
-            <a:r>
-              <a:rPr lang="en-US" sz="2200" dirty="0" smtClean="0"/>
-              <a:t>large set of terms for the different pieces of these new </a:t>
-            </a:r>
-            <a:r>
-              <a:rPr lang="en-US" sz="2200" dirty="0" smtClean="0"/>
-              <a:t>software architectures </a:t>
-            </a:r>
-            <a:r>
-              <a:rPr lang="en-US" sz="2200" dirty="0" smtClean="0"/>
-              <a:t>began to appear: progressive web apps, static </a:t>
-            </a:r>
-            <a:r>
-              <a:rPr lang="en-US" sz="2200" dirty="0" smtClean="0"/>
-              <a:t>sites, frontend </a:t>
-            </a:r>
-            <a:r>
-              <a:rPr lang="en-US" sz="2200" dirty="0" smtClean="0"/>
-              <a:t>build pipelines, </a:t>
-            </a:r>
-            <a:r>
-              <a:rPr lang="en-US" sz="2200" dirty="0" smtClean="0"/>
-              <a:t>single-page applications</a:t>
-            </a:r>
-            <a:r>
-              <a:rPr lang="en-US" sz="2200" dirty="0" smtClean="0"/>
-              <a:t>, decoupled </a:t>
-            </a:r>
-            <a:r>
-              <a:rPr lang="en-US" sz="2200" dirty="0" smtClean="0"/>
-              <a:t>web projects</a:t>
-            </a:r>
-            <a:r>
-              <a:rPr lang="en-US" sz="2200" dirty="0" smtClean="0"/>
-              <a:t>, and </a:t>
+              <a:t>A large set of terms for the different pieces of these new software architectures began to appear: progressive web apps, static sites, frontend build pipelines, single-page applications, decoupled web projects, and </a:t>
             </a:r>
             <a:r>
               <a:rPr lang="en-US" sz="2200" dirty="0" err="1" smtClean="0"/>
@@ -4588,45 +4533,13 @@
             </a:r>
             <a:r>
               <a:rPr lang="en-US" sz="2200" dirty="0" smtClean="0"/>
-              <a:t> </a:t>
-            </a:r>
+              <a:t> functions.</a:t>
+            </a:r>
+          </a:p>
+          <a:p>
             <a:r>
               <a:rPr lang="en-US" sz="2200" dirty="0" smtClean="0"/>
-              <a:t>functions.</a:t>
-            </a:r>
-          </a:p>
-          <a:p>
-            <a:r>
-              <a:rPr lang="en-US" sz="2200" dirty="0" smtClean="0"/>
-              <a:t>However</a:t>
-            </a:r>
-            <a:r>
-              <a:rPr lang="en-US" sz="2200" dirty="0" smtClean="0"/>
-              <a:t>, none of them </a:t>
-            </a:r>
-            <a:r>
-              <a:rPr lang="en-US" sz="2200" dirty="0" smtClean="0"/>
-              <a:t>really captured </a:t>
-            </a:r>
-            <a:r>
-              <a:rPr lang="en-US" sz="2200" dirty="0" smtClean="0"/>
-              <a:t>the move to a new architecture that encompassed </a:t>
-            </a:r>
-            <a:r>
-              <a:rPr lang="en-US" sz="2200" dirty="0" smtClean="0"/>
-              <a:t>content-driven websites</a:t>
-            </a:r>
-            <a:r>
-              <a:rPr lang="en-US" sz="2200" dirty="0" smtClean="0"/>
-              <a:t>, web applications, and all the interesting </a:t>
-            </a:r>
-            <a:r>
-              <a:rPr lang="en-US" sz="2200" dirty="0" smtClean="0"/>
-              <a:t>hybrids between </a:t>
-            </a:r>
-            <a:r>
-              <a:rPr lang="en-US" sz="2200" dirty="0" smtClean="0"/>
-              <a:t>the two.</a:t>
+              <a:t>However, none of them really captured the move to a new architecture that encompassed content-driven websites, web applications, and all the interesting hybrids between the two.</a:t>
             </a:r>
           </a:p>
           <a:p>
@@ -4719,21 +4632,13 @@
           <a:p>
             <a:r>
               <a:rPr lang="en-US" sz="2400" dirty="0" smtClean="0"/>
-              <a:t>HTML </a:t>
-            </a:r>
+              <a:t>HTML Content</a:t>
+            </a:r>
+          </a:p>
+          <a:p>
             <a:r>
               <a:rPr lang="en-US" sz="2400" dirty="0" smtClean="0"/>
-              <a:t>Content</a:t>
-            </a:r>
-          </a:p>
-          <a:p>
-            <a:r>
-              <a:rPr lang="en-US" sz="2400" dirty="0" smtClean="0"/>
-              <a:t>Content from a </a:t>
-            </a:r>
-            <a:r>
-              <a:rPr lang="en-US" sz="2400" dirty="0" smtClean="0"/>
-              <a:t>CMS</a:t>
+              <a:t>Content from a CMS</a:t>
             </a:r>
           </a:p>
           <a:p>
@@ -4818,19 +4723,7 @@
             </a:r>
             <a:r>
               <a:rPr lang="en-US" sz="2400" dirty="0" smtClean="0"/>
-              <a:t> project </a:t>
-            </a:r>
-            <a:r>
-              <a:rPr lang="en-US" sz="2400" dirty="0" smtClean="0"/>
-              <a:t>is largely </a:t>
-            </a:r>
-            <a:r>
-              <a:rPr lang="en-US" sz="2400" dirty="0" smtClean="0"/>
-              <a:t>a simple folder structure full of text files. The contents </a:t>
-            </a:r>
-            <a:r>
-              <a:rPr lang="en-US" sz="2400" dirty="0" smtClean="0"/>
-              <a:t>of your </a:t>
+              <a:t> project is largely a simple folder structure full of text files. The contents of your </a:t>
             </a:r>
             <a:r>
               <a:rPr lang="en-US" sz="2400" dirty="0" err="1" smtClean="0"/>
@@ -4838,22 +4731,14 @@
             </a:r>
             <a:r>
               <a:rPr lang="en-US" sz="2400" dirty="0" smtClean="0"/>
-              <a:t> project will usually include the following</a:t>
-            </a:r>
-            <a:r>
-              <a:rPr lang="en-US" sz="2400" dirty="0" smtClean="0"/>
-              <a:t>:</a:t>
+              <a:t> project will usually include the following:</a:t>
             </a:r>
           </a:p>
           <a:p>
             <a:pPr lvl="1"/>
             <a:r>
               <a:rPr lang="en-US" sz="2000" dirty="0" smtClean="0"/>
-              <a:t>A source folder to store your content </a:t>
-            </a:r>
-            <a:r>
-              <a:rPr lang="en-US" sz="2000" dirty="0" smtClean="0"/>
-              <a:t>files</a:t>
+              <a:t>A source folder to store your content files</a:t>
             </a:r>
           </a:p>
           <a:p>
@@ -4867,33 +4752,21 @@
             <a:pPr lvl="1"/>
             <a:r>
               <a:rPr lang="en-US" sz="2000" dirty="0" smtClean="0"/>
-              <a:t>A </a:t>
-            </a:r>
+              <a:t>A configuration file containing the settings for the build process</a:t>
+            </a:r>
+          </a:p>
+          <a:p>
+            <a:pPr lvl="1"/>
             <a:r>
               <a:rPr lang="en-US" sz="2000" dirty="0" smtClean="0"/>
-              <a:t>configuration file containing the settings for the build process</a:t>
+              <a:t>A static site generator, usually added as a dependency</a:t>
             </a:r>
           </a:p>
           <a:p>
             <a:pPr lvl="1"/>
             <a:r>
               <a:rPr lang="en-US" sz="2000" dirty="0" smtClean="0"/>
-              <a:t>A </a:t>
-            </a:r>
-            <a:r>
-              <a:rPr lang="en-US" sz="2000" dirty="0" smtClean="0"/>
-              <a:t>static site generator, usually added as a dependency</a:t>
-            </a:r>
-          </a:p>
-          <a:p>
-            <a:pPr lvl="1"/>
-            <a:r>
-              <a:rPr lang="en-US" sz="2000" dirty="0" smtClean="0"/>
-              <a:t>A </a:t>
-            </a:r>
-            <a:r>
-              <a:rPr lang="en-US" sz="2000" dirty="0" smtClean="0"/>
-              <a:t>destination folder to save the final output</a:t>
+              <a:t>A destination folder to save the final output</a:t>
             </a:r>
             <a:endParaRPr lang="en-US" sz="1800" dirty="0"/>
           </a:p>
@@ -4964,11 +4837,7 @@
           <a:p>
             <a:r>
               <a:rPr lang="en-US" sz="2400" dirty="0" smtClean="0"/>
-              <a:t>Text </a:t>
-            </a:r>
-            <a:r>
-              <a:rPr lang="en-US" sz="2400" dirty="0" smtClean="0"/>
-              <a:t>Files</a:t>
+              <a:t>Text Files</a:t>
             </a:r>
           </a:p>
           <a:p>
@@ -4978,21 +4847,13 @@
             </a:r>
             <a:r>
               <a:rPr lang="en-US" sz="2400" dirty="0" smtClean="0"/>
-              <a:t>-Based </a:t>
-            </a:r>
+              <a:t>-Based CMS</a:t>
+            </a:r>
+          </a:p>
+          <a:p>
             <a:r>
               <a:rPr lang="en-US" sz="2400" dirty="0" smtClean="0"/>
-              <a:t>CMS</a:t>
-            </a:r>
-          </a:p>
-          <a:p>
-            <a:r>
-              <a:rPr lang="en-US" sz="2400" dirty="0" smtClean="0"/>
-              <a:t>Headless </a:t>
-            </a:r>
-            <a:r>
-              <a:rPr lang="en-US" sz="2400" dirty="0" smtClean="0"/>
-              <a:t>CMS</a:t>
+              <a:t>Headless CMS</a:t>
             </a:r>
           </a:p>
           <a:p>
@@ -5077,23 +4938,7 @@
             </a:r>
             <a:r>
               <a:rPr lang="en-US" sz="2400" dirty="0" smtClean="0"/>
-              <a:t> is </a:t>
-            </a:r>
-            <a:r>
-              <a:rPr lang="en-US" sz="2400" dirty="0" smtClean="0"/>
-              <a:t>picking the appropriate site generator from the </a:t>
-            </a:r>
-            <a:r>
-              <a:rPr lang="en-US" sz="2400" dirty="0" smtClean="0"/>
-              <a:t>ever-expanding list </a:t>
-            </a:r>
-            <a:r>
-              <a:rPr lang="en-US" sz="2400" dirty="0" smtClean="0"/>
-              <a:t>of options</a:t>
-            </a:r>
-            <a:r>
-              <a:rPr lang="en-US" sz="2400" dirty="0" smtClean="0"/>
-              <a:t>.</a:t>
+              <a:t> is picking the appropriate site generator from the ever-expanding list of options.</a:t>
             </a:r>
           </a:p>
           <a:p>
@@ -5101,13 +4946,7 @@
               <a:rPr lang="en-US" sz="2400" dirty="0" smtClean="0">
                 <a:hlinkClick r:id="rId2"/>
               </a:rPr>
-              <a:t>https://jamstack.org/generators</a:t>
-            </a:r>
-            <a:r>
-              <a:rPr lang="en-US" sz="2400" dirty="0" smtClean="0">
-                <a:hlinkClick r:id="rId2"/>
-              </a:rPr>
-              <a:t>/</a:t>
+              <a:t>https://jamstack.org/generators/</a:t>
             </a:r>
             <a:endParaRPr lang="en-US" sz="2400" dirty="0" smtClean="0"/>
           </a:p>
@@ -5181,33 +5020,13 @@
           <a:p>
             <a:r>
               <a:rPr lang="en-US" sz="2400" dirty="0" smtClean="0"/>
-              <a:t>All site generators have a build command that can be run from </a:t>
-            </a:r>
+              <a:t>All site generators have a build command that can be run from the terminal.</a:t>
+            </a:r>
+          </a:p>
+          <a:p>
             <a:r>
               <a:rPr lang="en-US" sz="2400" dirty="0" smtClean="0"/>
-              <a:t>the terminal.</a:t>
-            </a:r>
-          </a:p>
-          <a:p>
-            <a:r>
-              <a:rPr lang="en-US" sz="2400" dirty="0" smtClean="0"/>
-              <a:t>The </a:t>
-            </a:r>
-            <a:r>
-              <a:rPr lang="en-US" sz="2400" dirty="0" smtClean="0"/>
-              <a:t>final assets are usually compiled to a folder named </a:t>
-            </a:r>
-            <a:r>
-              <a:rPr lang="en-US" sz="2400" dirty="0" smtClean="0"/>
-              <a:t>dist or </a:t>
-            </a:r>
-            <a:r>
-              <a:rPr lang="en-US" sz="2400" dirty="0" smtClean="0"/>
-              <a:t>build and then can be uploaded to almost any server or CDN</a:t>
-            </a:r>
-            <a:r>
-              <a:rPr lang="en-US" sz="2400" dirty="0" smtClean="0"/>
-              <a:t>.</a:t>
+              <a:t>The final assets are usually compiled to a folder named dist or build and then can be uploaded to almost any server or CDN.</a:t>
             </a:r>
           </a:p>
           <a:p>
@@ -5220,11 +5039,7 @@
             <a:pPr lvl="1"/>
             <a:r>
               <a:rPr lang="en-US" sz="2000" dirty="0" smtClean="0"/>
-              <a:t>Listen </a:t>
-            </a:r>
-            <a:r>
-              <a:rPr lang="en-US" sz="2000" dirty="0" smtClean="0"/>
-              <a:t>for notifications of changes to your </a:t>
+              <a:t>Listen for notifications of changes to your </a:t>
             </a:r>
             <a:r>
               <a:rPr lang="en-US" sz="2000" dirty="0" err="1" smtClean="0"/>
@@ -5232,11 +5047,7 @@
             </a:r>
             <a:r>
               <a:rPr lang="en-US" sz="2000" dirty="0" smtClean="0"/>
-              <a:t> repository (</a:t>
-            </a:r>
-            <a:r>
-              <a:rPr lang="en-US" sz="2000" dirty="0" smtClean="0"/>
-              <a:t>usually via </a:t>
+              <a:t> repository (usually via </a:t>
             </a:r>
             <a:r>
               <a:rPr lang="en-US" sz="2000" dirty="0" err="1" smtClean="0"/>
@@ -5251,44 +5062,28 @@
             <a:pPr lvl="1"/>
             <a:r>
               <a:rPr lang="en-US" sz="2000" dirty="0" smtClean="0"/>
-              <a:t>Prepare </a:t>
-            </a:r>
+              <a:t>Prepare the build environment and fetch any required dependencies.</a:t>
+            </a:r>
+          </a:p>
+          <a:p>
+            <a:pPr lvl="1"/>
             <a:r>
               <a:rPr lang="en-US" sz="2000" dirty="0" smtClean="0"/>
-              <a:t>the build environment and fetch any required dependencies.</a:t>
+              <a:t>Fetch remote data from APIs (as needed).</a:t>
             </a:r>
           </a:p>
           <a:p>
             <a:pPr lvl="1"/>
             <a:r>
               <a:rPr lang="en-US" sz="2000" dirty="0" smtClean="0"/>
-              <a:t>Fetch </a:t>
-            </a:r>
+              <a:t>Build the site and prepare assets.</a:t>
+            </a:r>
+          </a:p>
+          <a:p>
+            <a:pPr lvl="1"/>
             <a:r>
               <a:rPr lang="en-US" sz="2000" dirty="0" smtClean="0"/>
-              <a:t>remote data from APIs (as needed).</a:t>
-            </a:r>
-          </a:p>
-          <a:p>
-            <a:pPr lvl="1"/>
-            <a:r>
-              <a:rPr lang="en-US" sz="2000" dirty="0" smtClean="0"/>
-              <a:t>Build </a:t>
-            </a:r>
-            <a:r>
-              <a:rPr lang="en-US" sz="2000" dirty="0" smtClean="0"/>
-              <a:t>the site and prepare assets.</a:t>
-            </a:r>
-          </a:p>
-          <a:p>
-            <a:pPr lvl="1"/>
-            <a:r>
-              <a:rPr lang="en-US" sz="2000" dirty="0" smtClean="0"/>
-              <a:t>Publish </a:t>
-            </a:r>
-            <a:r>
-              <a:rPr lang="en-US" sz="2000" dirty="0" smtClean="0"/>
-              <a:t>the final site to a CDN.</a:t>
+              <a:t>Publish the final site to a CDN.</a:t>
             </a:r>
             <a:endParaRPr lang="en-US" sz="2000" dirty="0"/>
           </a:p>
@@ -5359,15 +5154,7 @@
           <a:p>
             <a:r>
               <a:rPr lang="en-US" sz="2400" dirty="0" smtClean="0"/>
-              <a:t>Publishing to a CDN usually means your site content becomes </a:t>
-            </a:r>
-            <a:r>
-              <a:rPr lang="en-US" sz="2400" dirty="0" smtClean="0"/>
-              <a:t>available to </a:t>
-            </a:r>
-            <a:r>
-              <a:rPr lang="en-US" sz="2400" dirty="0" smtClean="0"/>
-              <a:t>a minimum of 10 or 15 locations worldwide.</a:t>
+              <a:t>Publishing to a CDN usually means your site content becomes available to a minimum of 10 or 15 locations worldwide.</a:t>
             </a:r>
             <a:endParaRPr lang="en-US" sz="2400" dirty="0"/>
           </a:p>
@@ -5438,23 +5225,7 @@
           <a:p>
             <a:r>
               <a:rPr lang="en-US" sz="2400" dirty="0" smtClean="0"/>
-              <a:t>In the example flow </a:t>
-            </a:r>
-            <a:r>
-              <a:rPr lang="en-US" sz="2400" dirty="0" smtClean="0"/>
-              <a:t>shown, </a:t>
-            </a:r>
-            <a:r>
-              <a:rPr lang="en-US" sz="2400" dirty="0" smtClean="0"/>
-              <a:t>notice how content </a:t>
-            </a:r>
-            <a:r>
-              <a:rPr lang="en-US" sz="2400" dirty="0" smtClean="0"/>
-              <a:t>is managed </a:t>
-            </a:r>
-            <a:r>
-              <a:rPr lang="en-US" sz="2400" dirty="0" smtClean="0"/>
-              <a:t>in a hosted CMS service called </a:t>
+              <a:t>In the example flow shown, notice how content is managed in a hosted CMS service called </a:t>
             </a:r>
             <a:r>
               <a:rPr lang="en-US" sz="2400" dirty="0" err="1" smtClean="0"/>
@@ -5468,11 +5239,7 @@
           <a:p>
             <a:r>
               <a:rPr lang="en-US" sz="2400" dirty="0" smtClean="0"/>
-              <a:t>Store owners and </a:t>
-            </a:r>
-            <a:r>
-              <a:rPr lang="en-US" sz="2400" dirty="0" smtClean="0"/>
-              <a:t>editors use the </a:t>
+              <a:t>Store owners and editors use the </a:t>
             </a:r>
             <a:r>
               <a:rPr lang="en-US" sz="2400" dirty="0" err="1" smtClean="0"/>
@@ -5480,19 +5247,7 @@
             </a:r>
             <a:r>
               <a:rPr lang="en-US" sz="2400" dirty="0" smtClean="0"/>
-              <a:t> interface to manage store listings </a:t>
-            </a:r>
-            <a:r>
-              <a:rPr lang="en-US" sz="2400" dirty="0" smtClean="0"/>
-              <a:t>and upload </a:t>
-            </a:r>
-            <a:r>
-              <a:rPr lang="en-US" sz="2400" dirty="0" smtClean="0"/>
-              <a:t>photos</a:t>
-            </a:r>
-            <a:r>
-              <a:rPr lang="en-US" sz="2400" dirty="0" smtClean="0"/>
-              <a:t>.</a:t>
+              <a:t> interface to manage store listings and upload photos.</a:t>
             </a:r>
           </a:p>
           <a:p>
@@ -5690,11 +5445,7 @@
           <a:p>
             <a:r>
               <a:rPr lang="en-US" dirty="0" smtClean="0"/>
-              <a:t>Providing </a:t>
-            </a:r>
-            <a:r>
-              <a:rPr lang="en-US" dirty="0" smtClean="0"/>
-              <a:t>Security</a:t>
+              <a:t>Providing Security</a:t>
             </a:r>
             <a:endParaRPr lang="en-US" dirty="0"/>
           </a:p>
@@ -5717,29 +5468,13 @@
           <a:p>
             <a:r>
               <a:rPr lang="en-US" sz="2400" dirty="0" smtClean="0"/>
-              <a:t>But with no servers to store user sessions, how do we connect all </a:t>
-            </a:r>
+              <a:t>But with no servers to store user sessions, how do we connect all of these discrete API calls? How do we handle authentication and identity?</a:t>
+            </a:r>
+          </a:p>
+          <a:p>
             <a:r>
               <a:rPr lang="en-US" sz="2400" dirty="0" smtClean="0"/>
-              <a:t>of these </a:t>
-            </a:r>
-            <a:r>
-              <a:rPr lang="en-US" sz="2400" dirty="0" smtClean="0"/>
-              <a:t>discrete API calls? How do we handle authentication and </a:t>
-            </a:r>
-            <a:r>
-              <a:rPr lang="en-US" sz="2400" dirty="0" smtClean="0"/>
-              <a:t>identity?</a:t>
-            </a:r>
-          </a:p>
-          <a:p>
-            <a:r>
-              <a:rPr lang="en-US" sz="2400" dirty="0" smtClean="0"/>
-              <a:t>To </a:t>
-            </a:r>
-            <a:r>
-              <a:rPr lang="en-US" sz="2400" dirty="0" smtClean="0"/>
-              <a:t>power user accounts, a </a:t>
+              <a:t>To power user accounts, a </a:t>
             </a:r>
             <a:r>
               <a:rPr lang="en-US" sz="2400" dirty="0" err="1" smtClean="0"/>
@@ -5747,45 +5482,13 @@
             </a:r>
             <a:r>
               <a:rPr lang="en-US" sz="2400" dirty="0" smtClean="0"/>
-              <a:t> application will often </a:t>
-            </a:r>
+              <a:t> application will often create a secure ID token stored in the browser. (This type of token is called a JavaScript Web Token, or JWT.)</a:t>
+            </a:r>
+          </a:p>
+          <a:p>
             <a:r>
               <a:rPr lang="en-US" sz="2400" dirty="0" smtClean="0"/>
-              <a:t>create a </a:t>
-            </a:r>
-            <a:r>
-              <a:rPr lang="en-US" sz="2400" dirty="0" smtClean="0"/>
-              <a:t>secure ID token stored in the browser. (This type of token </a:t>
-            </a:r>
-            <a:r>
-              <a:rPr lang="en-US" sz="2400" dirty="0" smtClean="0"/>
-              <a:t>is called </a:t>
-            </a:r>
-            <a:r>
-              <a:rPr lang="en-US" sz="2400" dirty="0" smtClean="0"/>
-              <a:t>a JavaScript Web Token, or JWT</a:t>
-            </a:r>
-            <a:r>
-              <a:rPr lang="en-US" sz="2400" dirty="0" smtClean="0"/>
-              <a:t>.)</a:t>
-            </a:r>
-          </a:p>
-          <a:p>
-            <a:r>
-              <a:rPr lang="en-US" sz="2400" dirty="0" smtClean="0"/>
-              <a:t>The </a:t>
-            </a:r>
-            <a:r>
-              <a:rPr lang="en-US" sz="2400" dirty="0" smtClean="0"/>
-              <a:t>identity is then </a:t>
-            </a:r>
-            <a:r>
-              <a:rPr lang="en-US" sz="2400" dirty="0" smtClean="0"/>
-              <a:t>passed with </a:t>
-            </a:r>
-            <a:r>
-              <a:rPr lang="en-US" sz="2400" dirty="0" smtClean="0"/>
-              <a:t>each API call so that services are aware of the user.</a:t>
+              <a:t>The identity is then passed with each API call so that services are aware of the user.</a:t>
             </a:r>
             <a:endParaRPr lang="en-US" sz="1800" dirty="0"/>
           </a:p>
@@ -5888,23 +5591,7 @@
             </a:r>
             <a:r>
               <a:rPr lang="en-US" sz="2400" dirty="0" smtClean="0"/>
-              <a:t> are sites that are capable of </a:t>
-            </a:r>
-            <a:r>
-              <a:rPr lang="en-US" sz="2400" dirty="0" smtClean="0"/>
-              <a:t>being served </a:t>
-            </a:r>
-            <a:r>
-              <a:rPr lang="en-US" sz="2400" dirty="0" smtClean="0"/>
-              <a:t>with static hosting infrastructure, but they can also </a:t>
-            </a:r>
-            <a:r>
-              <a:rPr lang="en-US" sz="2400" dirty="0" smtClean="0"/>
-              <a:t>be enriched </a:t>
-            </a:r>
-            <a:r>
-              <a:rPr lang="en-US" sz="2400" dirty="0" smtClean="0"/>
-              <a:t>with </a:t>
+              <a:t> are sites that are capable of being served with static hosting infrastructure, but they can also be enriched with </a:t>
             </a:r>
             <a:r>
               <a:rPr lang="en-US" sz="2400" i="1" dirty="0" smtClean="0">
@@ -5931,6 +5618,86 @@
 </file>
 
 <file path=ppt/slides/slide22.xml><?xml version="1.0" encoding="utf-8"?>
+<p:sld xmlns:a="http://schemas.openxmlformats.org/drawingml/2006/main" xmlns:r="http://schemas.openxmlformats.org/officeDocument/2006/relationships" xmlns:p="http://schemas.openxmlformats.org/presentationml/2006/main">
+  <p:cSld>
+    <p:spTree>
+      <p:nvGrpSpPr>
+        <p:cNvPr id="1" name=""/>
+        <p:cNvGrpSpPr/>
+        <p:nvPr/>
+      </p:nvGrpSpPr>
+      <p:grpSpPr>
+        <a:xfrm>
+          <a:off x="0" y="0"/>
+          <a:ext cx="0" cy="0"/>
+          <a:chOff x="0" y="0"/>
+          <a:chExt cx="0" cy="0"/>
+        </a:xfrm>
+      </p:grpSpPr>
+      <p:sp>
+        <p:nvSpPr>
+          <p:cNvPr id="2" name="Title 1"/>
+          <p:cNvSpPr>
+            <a:spLocks noGrp="1"/>
+          </p:cNvSpPr>
+          <p:nvPr>
+            <p:ph type="title"/>
+          </p:nvPr>
+        </p:nvSpPr>
+        <p:spPr/>
+        <p:txBody>
+          <a:bodyPr/>
+          <a:lstStyle/>
+          <a:p>
+            <a:r>
+              <a:rPr lang="en-US" dirty="0" err="1" smtClean="0"/>
+              <a:t>Jamstack</a:t>
+            </a:r>
+            <a:r>
+              <a:rPr lang="en-US" smtClean="0"/>
+              <a:t> Demo</a:t>
+            </a:r>
+            <a:endParaRPr lang="en-US" dirty="0"/>
+          </a:p>
+        </p:txBody>
+      </p:sp>
+      <p:sp>
+        <p:nvSpPr>
+          <p:cNvPr id="3" name="Content Placeholder 2"/>
+          <p:cNvSpPr>
+            <a:spLocks noGrp="1"/>
+          </p:cNvSpPr>
+          <p:nvPr>
+            <p:ph idx="1"/>
+          </p:nvPr>
+        </p:nvSpPr>
+        <p:spPr/>
+        <p:txBody>
+          <a:bodyPr/>
+          <a:lstStyle/>
+          <a:p>
+            <a:r>
+              <a:rPr lang="en-US" sz="2400" dirty="0" smtClean="0">
+                <a:hlinkClick r:id="rId2"/>
+              </a:rPr>
+              <a:t>https://jamstack.org/</a:t>
+            </a:r>
+            <a:endParaRPr lang="en-US" sz="2400" dirty="0" smtClean="0"/>
+          </a:p>
+          <a:p>
+            <a:endParaRPr lang="en-US" sz="2400" dirty="0"/>
+          </a:p>
+        </p:txBody>
+      </p:sp>
+    </p:spTree>
+  </p:cSld>
+  <p:clrMapOvr>
+    <a:masterClrMapping/>
+  </p:clrMapOvr>
+</p:sld>
+</file>
+
+<file path=ppt/slides/slide23.xml><?xml version="1.0" encoding="utf-8"?>
 <p:sld xmlns:a="http://schemas.openxmlformats.org/drawingml/2006/main" xmlns:r="http://schemas.openxmlformats.org/officeDocument/2006/relationships" xmlns:p="http://schemas.openxmlformats.org/presentationml/2006/main">
   <p:cSld>
     <p:spTree>
